--- a/media/resources/files/EkiOrunduuOnduktar_Koshuu_Kemituu_SandarJanaSozdor.pptx
+++ b/media/resources/files/EkiOrunduuOnduktar_Koshuu_Kemituu_SandarJanaSozdor.pptx
@@ -5390,7 +5390,7 @@
                   <a:schemeClr val="tx1"/>
                 </a:solidFill>
               </a:rPr>
-              <a:t>0.17</a:t>
+              <a:t>0,17</a:t>
             </a:r>
             <a:endParaRPr lang="en-GB" sz="1200" b="1" dirty="0">
               <a:solidFill>
@@ -5719,7 +5719,7 @@
                   <a:schemeClr val="tx1"/>
                 </a:solidFill>
               </a:rPr>
-              <a:t>0.81</a:t>
+              <a:t>0,81</a:t>
             </a:r>
             <a:endParaRPr lang="en-GB" sz="1200" b="1" dirty="0">
               <a:solidFill>
@@ -6048,7 +6048,7 @@
                   <a:schemeClr val="tx1"/>
                 </a:solidFill>
               </a:rPr>
-              <a:t>0.8</a:t>
+              <a:t>0,8</a:t>
             </a:r>
             <a:endParaRPr lang="en-GB" sz="1200" b="1" dirty="0">
               <a:solidFill>
@@ -6377,7 +6377,7 @@
                   <a:schemeClr val="tx1"/>
                 </a:solidFill>
               </a:rPr>
-              <a:t>0.111</a:t>
+              <a:t>0,111</a:t>
             </a:r>
           </a:p>
         </p:txBody>
@@ -6701,7 +6701,7 @@
                   <a:schemeClr val="tx1"/>
                 </a:solidFill>
               </a:rPr>
-              <a:t>0.19</a:t>
+              <a:t>0,19</a:t>
             </a:r>
             <a:endParaRPr lang="en-GB" sz="1200" b="1" dirty="0">
               <a:solidFill>
@@ -7030,7 +7030,7 @@
                   <a:schemeClr val="tx1"/>
                 </a:solidFill>
               </a:rPr>
-              <a:t>1.8</a:t>
+              <a:t>1,8</a:t>
             </a:r>
             <a:endParaRPr lang="en-GB" sz="1200" b="1" dirty="0">
               <a:solidFill>
@@ -7359,7 +7359,7 @@
                   <a:schemeClr val="tx1"/>
                 </a:solidFill>
               </a:rPr>
-              <a:t>2.02</a:t>
+              <a:t>2,02</a:t>
             </a:r>
             <a:endParaRPr lang="en-GB" sz="1200" b="1" dirty="0">
               <a:solidFill>
@@ -7688,7 +7688,7 @@
                   <a:schemeClr val="tx1"/>
                 </a:solidFill>
               </a:rPr>
-              <a:t>2.99</a:t>
+              <a:t>2,99</a:t>
             </a:r>
             <a:endParaRPr lang="en-GB" sz="1200" b="1" dirty="0">
               <a:solidFill>
@@ -8017,7 +8017,7 @@
                   <a:schemeClr val="tx1"/>
                 </a:solidFill>
               </a:rPr>
-              <a:t>0.25</a:t>
+              <a:t>0,25</a:t>
             </a:r>
           </a:p>
         </p:txBody>
@@ -8341,7 +8341,7 @@
                   <a:schemeClr val="tx1"/>
                 </a:solidFill>
               </a:rPr>
-              <a:t>1.25</a:t>
+              <a:t>1,25</a:t>
             </a:r>
           </a:p>
         </p:txBody>
@@ -8665,7 +8665,7 @@
                   <a:schemeClr val="tx1"/>
                 </a:solidFill>
               </a:rPr>
-              <a:t>0.82</a:t>
+              <a:t>0,82</a:t>
             </a:r>
           </a:p>
         </p:txBody>
@@ -8989,7 +8989,7 @@
                   <a:schemeClr val="tx1"/>
                 </a:solidFill>
               </a:rPr>
-              <a:t>1.78</a:t>
+              <a:t>1,78</a:t>
             </a:r>
           </a:p>
         </p:txBody>
@@ -9858,7 +9858,7 @@
                   <a:schemeClr val="tx1"/>
                 </a:solidFill>
               </a:rPr>
-              <a:t>0.63</a:t>
+              <a:t>0,63</a:t>
             </a:r>
           </a:p>
         </p:txBody>
@@ -10216,7 +10216,7 @@
                   <a:schemeClr val="tx1"/>
                 </a:solidFill>
               </a:rPr>
-              <a:t>2.19</a:t>
+              <a:t>2,19</a:t>
             </a:r>
           </a:p>
         </p:txBody>
@@ -10574,7 +10574,7 @@
                   <a:schemeClr val="tx1"/>
                 </a:solidFill>
               </a:rPr>
-              <a:t>2.1</a:t>
+              <a:t>2,1</a:t>
             </a:r>
           </a:p>
         </p:txBody>
@@ -10932,7 +10932,7 @@
                   <a:schemeClr val="tx1"/>
                 </a:solidFill>
               </a:rPr>
-              <a:t>0.37</a:t>
+              <a:t>0,37</a:t>
             </a:r>
           </a:p>
         </p:txBody>
@@ -11290,7 +11290,7 @@
                   <a:schemeClr val="tx1"/>
                 </a:solidFill>
               </a:rPr>
-              <a:t>0.19</a:t>
+              <a:t>0,19</a:t>
             </a:r>
           </a:p>
         </p:txBody>
@@ -11648,7 +11648,7 @@
                   <a:schemeClr val="tx1"/>
                 </a:solidFill>
               </a:rPr>
-              <a:t>2.35</a:t>
+              <a:t>2,35</a:t>
             </a:r>
           </a:p>
         </p:txBody>
@@ -12006,7 +12006,7 @@
                   <a:schemeClr val="tx1"/>
                 </a:solidFill>
               </a:rPr>
-              <a:t>5.3</a:t>
+              <a:t>5,3</a:t>
             </a:r>
           </a:p>
         </p:txBody>
@@ -12364,7 +12364,7 @@
                   <a:schemeClr val="tx1"/>
                 </a:solidFill>
               </a:rPr>
-              <a:t>2.1</a:t>
+              <a:t>2,1</a:t>
             </a:r>
           </a:p>
         </p:txBody>
@@ -12722,7 +12722,7 @@
                   <a:schemeClr val="tx1"/>
                 </a:solidFill>
               </a:rPr>
-              <a:t>0.35</a:t>
+              <a:t>0,35</a:t>
             </a:r>
           </a:p>
         </p:txBody>
@@ -13221,7 +13221,7 @@
                   <a:schemeClr val="tx1"/>
                 </a:solidFill>
               </a:rPr>
-              <a:t>2.47</a:t>
+              <a:t>2,47</a:t>
             </a:r>
           </a:p>
         </p:txBody>
@@ -13720,7 +13720,7 @@
                   <a:schemeClr val="tx1"/>
                 </a:solidFill>
               </a:rPr>
-              <a:t>0.96</a:t>
+              <a:t>0,96</a:t>
             </a:r>
           </a:p>
         </p:txBody>
@@ -14219,7 +14219,7 @@
                   <a:schemeClr val="tx1"/>
                 </a:solidFill>
               </a:rPr>
-              <a:t>2.54</a:t>
+              <a:t>2,54</a:t>
             </a:r>
           </a:p>
         </p:txBody>
@@ -14718,7 +14718,7 @@
                   <a:schemeClr val="tx1"/>
                 </a:solidFill>
               </a:rPr>
-              <a:t>0.2</a:t>
+              <a:t>0,2</a:t>
             </a:r>
           </a:p>
         </p:txBody>
@@ -15134,7 +15134,7 @@
                   <a:srgbClr val="0070C0"/>
                 </a:solidFill>
               </a:rPr>
-              <a:t>0.57</a:t>
+              <a:t>0,57</a:t>
             </a:r>
             <a:endParaRPr lang="en-GB" sz="1600" b="1" dirty="0">
               <a:solidFill>
@@ -15308,7 +15308,7 @@
                 <a:ea typeface="+mn-ea"/>
                 <a:cs typeface="+mn-cs"/>
               </a:rPr>
-              <a:t>0.17</a:t>
+              <a:t>0,17</a:t>
             </a:r>
             <a:endParaRPr kumimoji="0" lang="en-GB" sz="1200" b="1" i="0" u="none" strike="noStrike" kern="1200" cap="none" spc="0" normalizeH="0" baseline="0" noProof="0" dirty="0">
               <a:ln>
@@ -15623,7 +15623,7 @@
                   <a:srgbClr val="0070C0"/>
                 </a:solidFill>
               </a:rPr>
-              <a:t>0.83</a:t>
+              <a:t>0,83</a:t>
             </a:r>
           </a:p>
         </p:txBody>
@@ -15792,7 +15792,7 @@
                 <a:ea typeface="+mn-ea"/>
                 <a:cs typeface="+mn-cs"/>
               </a:rPr>
-              <a:t>0.81</a:t>
+              <a:t>0,81</a:t>
             </a:r>
             <a:endParaRPr kumimoji="0" lang="en-GB" sz="1200" b="1" i="0" u="none" strike="noStrike" kern="1200" cap="none" spc="0" normalizeH="0" baseline="0" noProof="0" dirty="0">
               <a:ln>
@@ -16107,7 +16107,7 @@
                   <a:srgbClr val="0070C0"/>
                 </a:solidFill>
               </a:rPr>
-              <a:t>1.2</a:t>
+              <a:t>1,2</a:t>
             </a:r>
             <a:endParaRPr lang="en-GB" sz="1600" b="1" dirty="0">
               <a:solidFill>
@@ -16281,7 +16281,7 @@
                 <a:ea typeface="+mn-ea"/>
                 <a:cs typeface="+mn-cs"/>
               </a:rPr>
-              <a:t>0.8</a:t>
+              <a:t>0,8</a:t>
             </a:r>
             <a:endParaRPr kumimoji="0" lang="en-GB" sz="1200" b="1" i="0" u="none" strike="noStrike" kern="1200" cap="none" spc="0" normalizeH="0" baseline="0" noProof="0" dirty="0">
               <a:ln>
@@ -16596,7 +16596,7 @@
                   <a:srgbClr val="0070C0"/>
                 </a:solidFill>
               </a:rPr>
-              <a:t>0.311</a:t>
+              <a:t>0,311</a:t>
             </a:r>
             <a:endParaRPr lang="en-GB" sz="1600" b="1" dirty="0">
               <a:solidFill>
@@ -16770,7 +16770,7 @@
                 <a:ea typeface="+mn-ea"/>
                 <a:cs typeface="+mn-cs"/>
               </a:rPr>
-              <a:t>0.111</a:t>
+              <a:t>0,111</a:t>
             </a:r>
           </a:p>
         </p:txBody>
@@ -17071,7 +17071,7 @@
                   <a:srgbClr val="0070C0"/>
                 </a:solidFill>
               </a:rPr>
-              <a:t>0.21</a:t>
+              <a:t>0,21</a:t>
             </a:r>
             <a:endParaRPr lang="en-GB" sz="1600" b="1" dirty="0">
               <a:solidFill>
@@ -17245,7 +17245,7 @@
                 <a:ea typeface="+mn-ea"/>
                 <a:cs typeface="+mn-cs"/>
               </a:rPr>
-              <a:t>0.19</a:t>
+              <a:t>0,19</a:t>
             </a:r>
             <a:endParaRPr kumimoji="0" lang="en-GB" sz="1200" b="1" i="0" u="none" strike="noStrike" kern="1200" cap="none" spc="0" normalizeH="0" baseline="0" noProof="0" dirty="0">
               <a:ln>
@@ -17576,7 +17576,7 @@
                   <a:srgbClr val="0070C0"/>
                 </a:solidFill>
               </a:rPr>
-              <a:t>2.5</a:t>
+              <a:t>2,5</a:t>
             </a:r>
             <a:endParaRPr kumimoji="0" lang="en-GB" sz="1600" b="1" i="0" u="none" strike="noStrike" kern="1200" cap="none" spc="0" normalizeH="0" baseline="0" noProof="0" dirty="0">
               <a:ln>
@@ -17759,7 +17759,7 @@
                 <a:ea typeface="+mn-ea"/>
                 <a:cs typeface="+mn-cs"/>
               </a:rPr>
-              <a:t>1.8</a:t>
+              <a:t>1,8</a:t>
             </a:r>
             <a:endParaRPr kumimoji="0" lang="en-GB" sz="1200" b="1" i="0" u="none" strike="noStrike" kern="1200" cap="none" spc="0" normalizeH="0" baseline="0" noProof="0" dirty="0">
               <a:ln>
@@ -18074,7 +18074,7 @@
                   <a:srgbClr val="0070C0"/>
                 </a:solidFill>
               </a:rPr>
-              <a:t>2.12</a:t>
+              <a:t>2,12</a:t>
             </a:r>
             <a:endParaRPr lang="en-GB" sz="1600" b="1" dirty="0">
               <a:solidFill>
@@ -18248,7 +18248,7 @@
                 <a:ea typeface="+mn-ea"/>
                 <a:cs typeface="+mn-cs"/>
               </a:rPr>
-              <a:t>2.02</a:t>
+              <a:t>2,02</a:t>
             </a:r>
             <a:endParaRPr kumimoji="0" lang="en-GB" sz="1200" b="1" i="0" u="none" strike="noStrike" kern="1200" cap="none" spc="0" normalizeH="0" baseline="0" noProof="0" dirty="0">
               <a:ln>
@@ -18563,7 +18563,7 @@
                   <a:srgbClr val="0070C0"/>
                 </a:solidFill>
               </a:rPr>
-              <a:t>3.06</a:t>
+              <a:t>3,06</a:t>
             </a:r>
             <a:endParaRPr lang="en-GB" sz="1600" b="1" dirty="0">
               <a:solidFill>
@@ -18737,7 +18737,7 @@
                 <a:ea typeface="+mn-ea"/>
                 <a:cs typeface="+mn-cs"/>
               </a:rPr>
-              <a:t>2.99</a:t>
+              <a:t>2,99</a:t>
             </a:r>
             <a:endParaRPr kumimoji="0" lang="en-GB" sz="1200" b="1" i="0" u="none" strike="noStrike" kern="1200" cap="none" spc="0" normalizeH="0" baseline="0" noProof="0" dirty="0">
               <a:ln>
@@ -19052,7 +19052,7 @@
                   <a:srgbClr val="0070C0"/>
                 </a:solidFill>
               </a:rPr>
-              <a:t>0.57</a:t>
+              <a:t>0,57</a:t>
             </a:r>
             <a:endParaRPr lang="en-GB" sz="1600" b="1" dirty="0">
               <a:solidFill>
@@ -19226,7 +19226,7 @@
                 <a:ea typeface="+mn-ea"/>
                 <a:cs typeface="+mn-cs"/>
               </a:rPr>
-              <a:t>0.25</a:t>
+              <a:t>0,25</a:t>
             </a:r>
           </a:p>
         </p:txBody>
@@ -19543,7 +19543,7 @@
                   <a:srgbClr val="0070C0"/>
                 </a:solidFill>
               </a:rPr>
-              <a:t>1.8</a:t>
+              <a:t>1,8</a:t>
             </a:r>
             <a:endParaRPr kumimoji="0" lang="en-GB" sz="1600" b="1" i="0" u="none" strike="noStrike" kern="1200" cap="none" spc="0" normalizeH="0" baseline="0" noProof="0" dirty="0">
               <a:ln>
@@ -19726,7 +19726,7 @@
                 <a:ea typeface="+mn-ea"/>
                 <a:cs typeface="+mn-cs"/>
               </a:rPr>
-              <a:t>1.25</a:t>
+              <a:t>1,25</a:t>
             </a:r>
           </a:p>
         </p:txBody>
@@ -20027,7 +20027,7 @@
                   <a:srgbClr val="0070C0"/>
                 </a:solidFill>
               </a:rPr>
-              <a:t>1.58</a:t>
+              <a:t>1,58</a:t>
             </a:r>
             <a:endParaRPr lang="en-GB" sz="1600" b="1" dirty="0">
               <a:solidFill>
@@ -20201,7 +20201,7 @@
                 <a:ea typeface="+mn-ea"/>
                 <a:cs typeface="+mn-cs"/>
               </a:rPr>
-              <a:t>0.82</a:t>
+              <a:t>0,82</a:t>
             </a:r>
           </a:p>
         </p:txBody>
@@ -20502,7 +20502,7 @@
                   <a:srgbClr val="0070C0"/>
                 </a:solidFill>
               </a:rPr>
-              <a:t>2.45</a:t>
+              <a:t>2,45</a:t>
             </a:r>
           </a:p>
         </p:txBody>
@@ -20671,7 +20671,7 @@
                 <a:ea typeface="+mn-ea"/>
                 <a:cs typeface="+mn-cs"/>
               </a:rPr>
-              <a:t>1.78</a:t>
+              <a:t>1,78</a:t>
             </a:r>
           </a:p>
         </p:txBody>
@@ -21792,7 +21792,7 @@
                 <a:ea typeface="+mn-ea"/>
                 <a:cs typeface="+mn-cs"/>
               </a:rPr>
-              <a:t>0.43</a:t>
+              <a:t>0,43</a:t>
             </a:r>
             <a:endParaRPr kumimoji="0" lang="en-GB" sz="1600" b="1" i="0" u="none" strike="noStrike" kern="1200" cap="none" spc="0" normalizeH="0" baseline="0" noProof="0" dirty="0">
               <a:ln>
@@ -21983,7 +21983,7 @@
                 <a:ea typeface="+mn-ea"/>
                 <a:cs typeface="+mn-cs"/>
               </a:rPr>
-              <a:t>0.63</a:t>
+              <a:t>0,63</a:t>
             </a:r>
           </a:p>
         </p:txBody>
@@ -22309,7 +22309,7 @@
                 <a:ea typeface="+mn-ea"/>
                 <a:cs typeface="+mn-cs"/>
               </a:rPr>
-              <a:t>2.12</a:t>
+              <a:t>2,12</a:t>
             </a:r>
             <a:endParaRPr kumimoji="0" lang="en-GB" sz="1600" b="1" i="0" u="none" strike="noStrike" kern="1200" cap="none" spc="0" normalizeH="0" baseline="0" noProof="0" dirty="0">
               <a:ln>
@@ -22500,7 +22500,7 @@
                 <a:ea typeface="+mn-ea"/>
                 <a:cs typeface="+mn-cs"/>
               </a:rPr>
-              <a:t>2.19</a:t>
+              <a:t>2,19</a:t>
             </a:r>
           </a:p>
         </p:txBody>
@@ -22826,7 +22826,7 @@
                 <a:ea typeface="+mn-ea"/>
                 <a:cs typeface="+mn-cs"/>
               </a:rPr>
-              <a:t>1.9</a:t>
+              <a:t>1,9</a:t>
             </a:r>
             <a:endParaRPr kumimoji="0" lang="en-GB" sz="1600" b="1" i="0" u="none" strike="noStrike" kern="1200" cap="none" spc="0" normalizeH="0" baseline="0" noProof="0" dirty="0">
               <a:ln>
@@ -23017,7 +23017,7 @@
                 <a:ea typeface="+mn-ea"/>
                 <a:cs typeface="+mn-cs"/>
               </a:rPr>
-              <a:t>2.1</a:t>
+              <a:t>2,1</a:t>
             </a:r>
           </a:p>
         </p:txBody>
@@ -23343,7 +23343,7 @@
                 <a:ea typeface="+mn-ea"/>
                 <a:cs typeface="+mn-cs"/>
               </a:rPr>
-              <a:t>0.07</a:t>
+              <a:t>0,07</a:t>
             </a:r>
             <a:endParaRPr kumimoji="0" lang="en-GB" sz="1600" b="1" i="0" u="none" strike="noStrike" kern="1200" cap="none" spc="0" normalizeH="0" baseline="0" noProof="0" dirty="0">
               <a:ln>
@@ -23534,7 +23534,7 @@
                 <a:ea typeface="+mn-ea"/>
                 <a:cs typeface="+mn-cs"/>
               </a:rPr>
-              <a:t>0.37</a:t>
+              <a:t>0,37</a:t>
             </a:r>
           </a:p>
         </p:txBody>
@@ -23860,7 +23860,7 @@
                 <a:ea typeface="+mn-ea"/>
                 <a:cs typeface="+mn-cs"/>
               </a:rPr>
-              <a:t>0.1</a:t>
+              <a:t>0,1</a:t>
             </a:r>
             <a:endParaRPr kumimoji="0" lang="en-GB" sz="1600" b="1" i="0" u="none" strike="noStrike" kern="1200" cap="none" spc="0" normalizeH="0" baseline="0" noProof="0" dirty="0">
               <a:ln>
@@ -24051,7 +24051,7 @@
                 <a:ea typeface="+mn-ea"/>
                 <a:cs typeface="+mn-cs"/>
               </a:rPr>
-              <a:t>0.19</a:t>
+              <a:t>0,19</a:t>
             </a:r>
           </a:p>
         </p:txBody>
@@ -24377,7 +24377,7 @@
                 <a:ea typeface="+mn-ea"/>
                 <a:cs typeface="+mn-cs"/>
               </a:rPr>
-              <a:t>1.75</a:t>
+              <a:t>1,75</a:t>
             </a:r>
             <a:endParaRPr kumimoji="0" lang="en-GB" sz="1600" b="1" i="0" u="none" strike="noStrike" kern="1200" cap="none" spc="0" normalizeH="0" baseline="0" noProof="0" dirty="0">
               <a:ln>
@@ -24568,7 +24568,7 @@
                 <a:ea typeface="+mn-ea"/>
                 <a:cs typeface="+mn-cs"/>
               </a:rPr>
-              <a:t>2.35</a:t>
+              <a:t>2,35</a:t>
             </a:r>
           </a:p>
         </p:txBody>
@@ -24894,7 +24894,7 @@
                 <a:ea typeface="+mn-ea"/>
                 <a:cs typeface="+mn-cs"/>
               </a:rPr>
-              <a:t>5.29</a:t>
+              <a:t>5,29</a:t>
             </a:r>
             <a:endParaRPr kumimoji="0" lang="en-GB" sz="1600" b="1" i="0" u="none" strike="noStrike" kern="1200" cap="none" spc="0" normalizeH="0" baseline="0" noProof="0" dirty="0">
               <a:ln>
@@ -25085,7 +25085,7 @@
                 <a:ea typeface="+mn-ea"/>
                 <a:cs typeface="+mn-cs"/>
               </a:rPr>
-              <a:t>5.3</a:t>
+              <a:t>5,3</a:t>
             </a:r>
           </a:p>
         </p:txBody>
@@ -25411,7 +25411,7 @@
                 <a:ea typeface="+mn-ea"/>
                 <a:cs typeface="+mn-cs"/>
               </a:rPr>
-              <a:t>1.99</a:t>
+              <a:t>1,99</a:t>
             </a:r>
             <a:endParaRPr kumimoji="0" lang="en-GB" sz="1600" b="1" i="0" u="none" strike="noStrike" kern="1200" cap="none" spc="0" normalizeH="0" baseline="0" noProof="0" dirty="0">
               <a:ln>
@@ -25602,7 +25602,7 @@
                 <a:ea typeface="+mn-ea"/>
                 <a:cs typeface="+mn-cs"/>
               </a:rPr>
-              <a:t>2.1</a:t>
+              <a:t>2,1</a:t>
             </a:r>
           </a:p>
         </p:txBody>
@@ -25928,7 +25928,7 @@
                 <a:ea typeface="+mn-ea"/>
                 <a:cs typeface="+mn-cs"/>
               </a:rPr>
-              <a:t>0.12</a:t>
+              <a:t>0,12</a:t>
             </a:r>
             <a:endParaRPr kumimoji="0" lang="en-GB" sz="1600" b="1" i="0" u="none" strike="noStrike" kern="1200" cap="none" spc="0" normalizeH="0" baseline="0" noProof="0" dirty="0">
               <a:ln>
@@ -26119,7 +26119,7 @@
                 <a:ea typeface="+mn-ea"/>
                 <a:cs typeface="+mn-cs"/>
               </a:rPr>
-              <a:t>0.35</a:t>
+              <a:t>0,35</a:t>
             </a:r>
           </a:p>
         </p:txBody>
@@ -26615,7 +26615,7 @@
                 <a:ea typeface="+mn-ea"/>
                 <a:cs typeface="+mn-cs"/>
               </a:rPr>
-              <a:t>2.09</a:t>
+              <a:t>2,09</a:t>
             </a:r>
             <a:endParaRPr kumimoji="0" lang="en-GB" sz="1600" b="1" i="0" u="none" strike="noStrike" kern="1200" cap="none" spc="0" normalizeH="0" baseline="0" noProof="0" dirty="0">
               <a:ln>
@@ -26806,7 +26806,7 @@
                 <a:ea typeface="+mn-ea"/>
                 <a:cs typeface="+mn-cs"/>
               </a:rPr>
-              <a:t>2.47</a:t>
+              <a:t>2,47</a:t>
             </a:r>
           </a:p>
         </p:txBody>
@@ -27302,7 +27302,7 @@
                 <a:ea typeface="+mn-ea"/>
                 <a:cs typeface="+mn-cs"/>
               </a:rPr>
-              <a:t>0.53</a:t>
+              <a:t>0,53</a:t>
             </a:r>
             <a:endParaRPr kumimoji="0" lang="en-GB" sz="1600" b="1" i="0" u="none" strike="noStrike" kern="1200" cap="none" spc="0" normalizeH="0" baseline="0" noProof="0" dirty="0">
               <a:ln>
@@ -27493,7 +27493,7 @@
                 <a:ea typeface="+mn-ea"/>
                 <a:cs typeface="+mn-cs"/>
               </a:rPr>
-              <a:t>0.96</a:t>
+              <a:t>0,96</a:t>
             </a:r>
           </a:p>
         </p:txBody>
@@ -27989,7 +27989,7 @@
                 <a:ea typeface="+mn-ea"/>
                 <a:cs typeface="+mn-cs"/>
               </a:rPr>
-              <a:t>3.15</a:t>
+              <a:t>3,15</a:t>
             </a:r>
             <a:endParaRPr kumimoji="0" lang="en-GB" sz="1600" b="1" i="0" u="none" strike="noStrike" kern="1200" cap="none" spc="0" normalizeH="0" baseline="0" noProof="0" dirty="0">
               <a:ln>
@@ -28180,7 +28180,7 @@
                 <a:ea typeface="+mn-ea"/>
                 <a:cs typeface="+mn-cs"/>
               </a:rPr>
-              <a:t>2.54</a:t>
+              <a:t>2,54</a:t>
             </a:r>
           </a:p>
         </p:txBody>
@@ -28676,7 +28676,7 @@
                 <a:ea typeface="+mn-ea"/>
                 <a:cs typeface="+mn-cs"/>
               </a:rPr>
-              <a:t>0.11</a:t>
+              <a:t>0,11</a:t>
             </a:r>
             <a:endParaRPr kumimoji="0" lang="en-GB" sz="1600" b="1" i="0" u="none" strike="noStrike" kern="1200" cap="none" spc="0" normalizeH="0" baseline="0" noProof="0" dirty="0">
               <a:ln>
@@ -28867,7 +28867,7 @@
                 <a:ea typeface="+mn-ea"/>
                 <a:cs typeface="+mn-cs"/>
               </a:rPr>
-              <a:t>0.2</a:t>
+              <a:t>0,2</a:t>
             </a:r>
           </a:p>
         </p:txBody>
